--- a/04-proposal/figures/fig-2-system-architecture.pptx
+++ b/04-proposal/figures/fig-2-system-architecture.pptx
@@ -966,11 +966,11 @@
                 <a:solidFill>
                   <a:srgbClr val="FFFFFF"/>
                 </a:solidFill>
-                <a:latin typeface="Times New Roman" pitchFamily="34" charset="0"/>
-                <a:ea typeface="Times New Roman" pitchFamily="34" charset="-122"/>
-                <a:cs typeface="Times New Roman" pitchFamily="34" charset="-120"/>
+                <a:latin typeface="Malgun Gothic" pitchFamily="34" charset="0"/>
+                <a:ea typeface="Malgun Gothic" pitchFamily="34" charset="-122"/>
+                <a:cs typeface="Malgun Gothic" pitchFamily="34" charset="-120"/>
               </a:rPr>
-              <a:t>Client Layer</a:t>
+              <a:t>클라이언트 계층</a:t>
             </a:r>
             <a:endParaRPr lang="en-US" sz="1100" dirty="0"/>
           </a:p>
@@ -985,7 +985,7 @@
         <p:spPr>
           <a:xfrm>
             <a:off x="3194000" y="404664"/>
-            <a:ext cx="1566169" cy="152400"/>
+            <a:ext cx="1733002" cy="152400"/>
           </a:xfrm>
           <a:prstGeom prst="rect">
             <a:avLst/>
@@ -1005,11 +1005,11 @@
                 <a:solidFill>
                   <a:srgbClr val="333333"/>
                 </a:solidFill>
-                <a:latin typeface="Times New Roman" pitchFamily="34" charset="0"/>
-                <a:ea typeface="Times New Roman" pitchFamily="34" charset="-122"/>
-                <a:cs typeface="Times New Roman" pitchFamily="34" charset="-120"/>
+                <a:latin typeface="Malgun Gothic" pitchFamily="34" charset="0"/>
+                <a:ea typeface="Malgun Gothic" pitchFamily="34" charset="-122"/>
+                <a:cs typeface="Malgun Gothic" pitchFamily="34" charset="-120"/>
               </a:rPr>
-              <a:t>REST API Client · Dashboard</a:t>
+              <a:t>REST API 클라이언트 · 대시보드</a:t>
             </a:r>
             <a:endParaRPr lang="en-US" sz="1000" dirty="0"/>
           </a:p>
@@ -1023,8 +1023,8 @@
         </p:nvSpPr>
         <p:spPr>
           <a:xfrm>
-            <a:off x="4496544" y="784027"/>
-            <a:ext cx="153930" cy="171450"/>
+            <a:off x="4497288" y="784027"/>
+            <a:ext cx="152412" cy="180975"/>
           </a:xfrm>
           <a:prstGeom prst="rect">
             <a:avLst/>
@@ -1044,9 +1044,9 @@
                 <a:solidFill>
                   <a:srgbClr val="888888"/>
                 </a:solidFill>
-                <a:latin typeface="Times New Roman" pitchFamily="34" charset="0"/>
-                <a:ea typeface="Times New Roman" pitchFamily="34" charset="-122"/>
-                <a:cs typeface="Times New Roman" pitchFamily="34" charset="-120"/>
+                <a:latin typeface="Malgun Gothic" pitchFamily="34" charset="0"/>
+                <a:ea typeface="Malgun Gothic" pitchFamily="34" charset="-122"/>
+                <a:cs typeface="Malgun Gothic" pitchFamily="34" charset="-120"/>
               </a:rPr>
               <a:t>▼</a:t>
             </a:r>
@@ -1062,8 +1062,8 @@
         </p:nvSpPr>
         <p:spPr>
           <a:xfrm>
-            <a:off x="381000" y="1031677"/>
-            <a:ext cx="8382000" cy="558701"/>
+            <a:off x="381000" y="1041202"/>
+            <a:ext cx="8382000" cy="568226"/>
           </a:xfrm>
           <a:prstGeom prst="rect">
             <a:avLst/>
@@ -1094,8 +1094,8 @@
         </p:nvSpPr>
         <p:spPr>
           <a:xfrm>
-            <a:off x="400050" y="1050727"/>
-            <a:ext cx="2590800" cy="520601"/>
+            <a:off x="400050" y="1060252"/>
+            <a:ext cx="2590800" cy="530126"/>
           </a:xfrm>
           <a:prstGeom prst="rect">
             <a:avLst/>
@@ -1124,7 +1124,7 @@
         </p:nvSpPr>
         <p:spPr>
           <a:xfrm>
-            <a:off x="552450" y="1177677"/>
+            <a:off x="552450" y="1187202"/>
             <a:ext cx="2331720" cy="161925"/>
           </a:xfrm>
           <a:prstGeom prst="rect">
@@ -1145,11 +1145,11 @@
                 <a:solidFill>
                   <a:srgbClr val="FFFFFF"/>
                 </a:solidFill>
-                <a:latin typeface="Times New Roman" pitchFamily="34" charset="0"/>
-                <a:ea typeface="Times New Roman" pitchFamily="34" charset="-122"/>
-                <a:cs typeface="Times New Roman" pitchFamily="34" charset="-120"/>
+                <a:latin typeface="Malgun Gothic" pitchFamily="34" charset="0"/>
+                <a:ea typeface="Malgun Gothic" pitchFamily="34" charset="-122"/>
+                <a:cs typeface="Malgun Gothic" pitchFamily="34" charset="-120"/>
               </a:rPr>
-              <a:t>API Layer</a:t>
+              <a:t>API 계층</a:t>
             </a:r>
             <a:endParaRPr lang="en-US" sz="1100" dirty="0"/>
           </a:p>
@@ -1163,8 +1163,8 @@
         </p:nvSpPr>
         <p:spPr>
           <a:xfrm>
-            <a:off x="552450" y="1339602"/>
-            <a:ext cx="2331720" cy="104775"/>
+            <a:off x="552450" y="1349127"/>
+            <a:ext cx="2331720" cy="114300"/>
           </a:xfrm>
           <a:prstGeom prst="rect">
             <a:avLst/>
@@ -1184,9 +1184,9 @@
                 <a:solidFill>
                   <a:srgbClr val="CCCCCC"/>
                 </a:solidFill>
-                <a:latin typeface="Times New Roman" pitchFamily="34" charset="0"/>
-                <a:ea typeface="Times New Roman" pitchFamily="34" charset="-122"/>
-                <a:cs typeface="Times New Roman" pitchFamily="34" charset="-120"/>
+                <a:latin typeface="Malgun Gothic" pitchFamily="34" charset="0"/>
+                <a:ea typeface="Malgun Gothic" pitchFamily="34" charset="-122"/>
+                <a:cs typeface="Malgun Gothic" pitchFamily="34" charset="-120"/>
               </a:rPr>
               <a:t>(Express.js)</a:t>
             </a:r>
@@ -1202,8 +1202,8 @@
         </p:nvSpPr>
         <p:spPr>
           <a:xfrm>
-            <a:off x="3194000" y="1234827"/>
-            <a:ext cx="3600504" cy="152400"/>
+            <a:off x="3194000" y="1249114"/>
+            <a:ext cx="2596316" cy="152400"/>
           </a:xfrm>
           <a:prstGeom prst="rect">
             <a:avLst/>
@@ -1223,11 +1223,11 @@
                 <a:solidFill>
                   <a:srgbClr val="333333"/>
                 </a:solidFill>
-                <a:latin typeface="Times New Roman" pitchFamily="34" charset="0"/>
-                <a:ea typeface="Times New Roman" pitchFamily="34" charset="-122"/>
-                <a:cs typeface="Times New Roman" pitchFamily="34" charset="-120"/>
+                <a:latin typeface="Malgun Gothic" pitchFamily="34" charset="0"/>
+                <a:ea typeface="Malgun Gothic" pitchFamily="34" charset="-122"/>
+                <a:cs typeface="Malgun Gothic" pitchFamily="34" charset="-120"/>
               </a:rPr>
-              <a:t>Request Mgmt · Scheduler Mgmt · Statistics/Fairness · Health Check</a:t>
+              <a:t>요청 관리 · 스케줄러 관리 · 통계/공정성 · 상태 확인</a:t>
             </a:r>
             <a:endParaRPr lang="en-US" sz="1000" dirty="0"/>
           </a:p>
@@ -1241,8 +1241,8 @@
         </p:nvSpPr>
         <p:spPr>
           <a:xfrm>
-            <a:off x="4496544" y="1666577"/>
-            <a:ext cx="153930" cy="171450"/>
+            <a:off x="4497288" y="1685627"/>
+            <a:ext cx="152412" cy="180975"/>
           </a:xfrm>
           <a:prstGeom prst="rect">
             <a:avLst/>
@@ -1262,9 +1262,9 @@
                 <a:solidFill>
                   <a:srgbClr val="888888"/>
                 </a:solidFill>
-                <a:latin typeface="Times New Roman" pitchFamily="34" charset="0"/>
-                <a:ea typeface="Times New Roman" pitchFamily="34" charset="-122"/>
-                <a:cs typeface="Times New Roman" pitchFamily="34" charset="-120"/>
+                <a:latin typeface="Malgun Gothic" pitchFamily="34" charset="0"/>
+                <a:ea typeface="Malgun Gothic" pitchFamily="34" charset="-122"/>
+                <a:cs typeface="Malgun Gothic" pitchFamily="34" charset="-120"/>
               </a:rPr>
               <a:t>▼</a:t>
             </a:r>
@@ -1280,8 +1280,8 @@
         </p:nvSpPr>
         <p:spPr>
           <a:xfrm>
-            <a:off x="381000" y="1914227"/>
-            <a:ext cx="8382000" cy="660202"/>
+            <a:off x="381000" y="1942802"/>
+            <a:ext cx="8382000" cy="669727"/>
           </a:xfrm>
           <a:prstGeom prst="rect">
             <a:avLst/>
@@ -1312,8 +1312,8 @@
         </p:nvSpPr>
         <p:spPr>
           <a:xfrm>
-            <a:off x="400050" y="1984028"/>
-            <a:ext cx="2590800" cy="520601"/>
+            <a:off x="400050" y="2007840"/>
+            <a:ext cx="2590800" cy="539651"/>
           </a:xfrm>
           <a:prstGeom prst="rect">
             <a:avLst/>
@@ -1342,7 +1342,7 @@
         </p:nvSpPr>
         <p:spPr>
           <a:xfrm>
-            <a:off x="552450" y="2110978"/>
+            <a:off x="552450" y="2134791"/>
             <a:ext cx="2331720" cy="161925"/>
           </a:xfrm>
           <a:prstGeom prst="rect">
@@ -1363,11 +1363,11 @@
                 <a:solidFill>
                   <a:srgbClr val="FFFFFF"/>
                 </a:solidFill>
-                <a:latin typeface="Times New Roman" pitchFamily="34" charset="0"/>
-                <a:ea typeface="Times New Roman" pitchFamily="34" charset="-122"/>
-                <a:cs typeface="Times New Roman" pitchFamily="34" charset="-120"/>
+                <a:latin typeface="Malgun Gothic" pitchFamily="34" charset="0"/>
+                <a:ea typeface="Malgun Gothic" pitchFamily="34" charset="-122"/>
+                <a:cs typeface="Malgun Gothic" pitchFamily="34" charset="-120"/>
               </a:rPr>
-              <a:t>Scheduler Engine</a:t>
+              <a:t>스케줄러 엔진</a:t>
             </a:r>
             <a:endParaRPr lang="en-US" sz="1100" dirty="0"/>
           </a:p>
@@ -1381,8 +1381,8 @@
         </p:nvSpPr>
         <p:spPr>
           <a:xfrm>
-            <a:off x="552450" y="2272903"/>
-            <a:ext cx="2331720" cy="104775"/>
+            <a:off x="552450" y="2296716"/>
+            <a:ext cx="2331720" cy="123825"/>
           </a:xfrm>
           <a:prstGeom prst="rect">
             <a:avLst/>
@@ -1402,11 +1402,11 @@
                 <a:solidFill>
                   <a:srgbClr val="CCCCCC"/>
                 </a:solidFill>
-                <a:latin typeface="Times New Roman" pitchFamily="34" charset="0"/>
-                <a:ea typeface="Times New Roman" pitchFamily="34" charset="-122"/>
-                <a:cs typeface="Times New Roman" pitchFamily="34" charset="-120"/>
+                <a:latin typeface="Malgun Gothic" pitchFamily="34" charset="0"/>
+                <a:ea typeface="Malgun Gothic" pitchFamily="34" charset="-122"/>
+                <a:cs typeface="Malgun Gothic" pitchFamily="34" charset="-120"/>
               </a:rPr>
-              <a:t>(Runtime-swappable)</a:t>
+              <a:t>(런타임 교체 가능)</a:t>
             </a:r>
             <a:endParaRPr lang="en-US" sz="800" dirty="0"/>
           </a:p>
@@ -1420,8 +1420,8 @@
         </p:nvSpPr>
         <p:spPr>
           <a:xfrm>
-            <a:off x="3194000" y="2034778"/>
-            <a:ext cx="558701" cy="238125"/>
+            <a:off x="3194000" y="2063353"/>
+            <a:ext cx="571500" cy="228600"/>
           </a:xfrm>
           <a:prstGeom prst="rect">
             <a:avLst/>
@@ -1452,8 +1452,8 @@
         </p:nvSpPr>
         <p:spPr>
           <a:xfrm>
-            <a:off x="3330476" y="2082403"/>
-            <a:ext cx="291465" cy="142875"/>
+            <a:off x="3330476" y="2110978"/>
+            <a:ext cx="304520" cy="133350"/>
           </a:xfrm>
           <a:prstGeom prst="rect">
             <a:avLst/>
@@ -1473,9 +1473,9 @@
                 <a:solidFill>
                   <a:srgbClr val="333333"/>
                 </a:solidFill>
-                <a:latin typeface="Times New Roman" pitchFamily="34" charset="0"/>
-                <a:ea typeface="Times New Roman" pitchFamily="34" charset="-122"/>
-                <a:cs typeface="Times New Roman" pitchFamily="34" charset="-120"/>
+                <a:latin typeface="Malgun Gothic" pitchFamily="34" charset="0"/>
+                <a:ea typeface="Malgun Gothic" pitchFamily="34" charset="-122"/>
+                <a:cs typeface="Malgun Gothic" pitchFamily="34" charset="-120"/>
               </a:rPr>
               <a:t>FCFS</a:t>
             </a:r>
@@ -1491,8 +1491,8 @@
         </p:nvSpPr>
         <p:spPr>
           <a:xfrm>
-            <a:off x="3828901" y="2034778"/>
-            <a:ext cx="660202" cy="238125"/>
+            <a:off x="3841700" y="2063353"/>
+            <a:ext cx="673150" cy="228600"/>
           </a:xfrm>
           <a:prstGeom prst="rect">
             <a:avLst/>
@@ -1523,8 +1523,8 @@
         </p:nvSpPr>
         <p:spPr>
           <a:xfrm>
-            <a:off x="3965377" y="2082403"/>
-            <a:ext cx="394996" cy="142875"/>
+            <a:off x="3978176" y="2110978"/>
+            <a:ext cx="408203" cy="133350"/>
           </a:xfrm>
           <a:prstGeom prst="rect">
             <a:avLst/>
@@ -1544,9 +1544,9 @@
                 <a:solidFill>
                   <a:srgbClr val="333333"/>
                 </a:solidFill>
-                <a:latin typeface="Times New Roman" pitchFamily="34" charset="0"/>
-                <a:ea typeface="Times New Roman" pitchFamily="34" charset="-122"/>
-                <a:cs typeface="Times New Roman" pitchFamily="34" charset="-120"/>
+                <a:latin typeface="Malgun Gothic" pitchFamily="34" charset="0"/>
+                <a:ea typeface="Malgun Gothic" pitchFamily="34" charset="-122"/>
+                <a:cs typeface="Malgun Gothic" pitchFamily="34" charset="-120"/>
               </a:rPr>
               <a:t>Priority</a:t>
             </a:r>
@@ -1562,8 +1562,8 @@
         </p:nvSpPr>
         <p:spPr>
           <a:xfrm>
-            <a:off x="4565303" y="2034778"/>
-            <a:ext cx="615851" cy="238125"/>
+            <a:off x="4591050" y="2063353"/>
+            <a:ext cx="596801" cy="228600"/>
           </a:xfrm>
           <a:prstGeom prst="rect">
             <a:avLst/>
@@ -1594,8 +1594,8 @@
         </p:nvSpPr>
         <p:spPr>
           <a:xfrm>
-            <a:off x="4701778" y="2082403"/>
-            <a:ext cx="349758" cy="142875"/>
+            <a:off x="4727525" y="2110978"/>
+            <a:ext cx="330327" cy="133350"/>
           </a:xfrm>
           <a:prstGeom prst="rect">
             <a:avLst/>
@@ -1615,9 +1615,9 @@
                 <a:solidFill>
                   <a:srgbClr val="333333"/>
                 </a:solidFill>
-                <a:latin typeface="Times New Roman" pitchFamily="34" charset="0"/>
-                <a:ea typeface="Times New Roman" pitchFamily="34" charset="-122"/>
-                <a:cs typeface="Times New Roman" pitchFamily="34" charset="-120"/>
+                <a:latin typeface="Malgun Gothic" pitchFamily="34" charset="0"/>
+                <a:ea typeface="Malgun Gothic" pitchFamily="34" charset="-122"/>
+                <a:cs typeface="Malgun Gothic" pitchFamily="34" charset="-120"/>
               </a:rPr>
               <a:t>MLFQ</a:t>
             </a:r>
@@ -1633,8 +1633,8 @@
         </p:nvSpPr>
         <p:spPr>
           <a:xfrm>
-            <a:off x="5257354" y="2034778"/>
-            <a:ext cx="546050" cy="238125"/>
+            <a:off x="5264051" y="2063353"/>
+            <a:ext cx="539651" cy="228600"/>
           </a:xfrm>
           <a:prstGeom prst="rect">
             <a:avLst/>
@@ -1665,8 +1665,8 @@
         </p:nvSpPr>
         <p:spPr>
           <a:xfrm>
-            <a:off x="5393829" y="2082403"/>
-            <a:ext cx="278562" cy="142875"/>
+            <a:off x="5400526" y="2110978"/>
+            <a:ext cx="272034" cy="133350"/>
           </a:xfrm>
           <a:prstGeom prst="rect">
             <a:avLst/>
@@ -1686,9 +1686,9 @@
                 <a:solidFill>
                   <a:srgbClr val="333333"/>
                 </a:solidFill>
-                <a:latin typeface="Times New Roman" pitchFamily="34" charset="0"/>
-                <a:ea typeface="Times New Roman" pitchFamily="34" charset="-122"/>
-                <a:cs typeface="Times New Roman" pitchFamily="34" charset="-120"/>
+                <a:latin typeface="Malgun Gothic" pitchFamily="34" charset="0"/>
+                <a:ea typeface="Malgun Gothic" pitchFamily="34" charset="-122"/>
+                <a:cs typeface="Malgun Gothic" pitchFamily="34" charset="-120"/>
               </a:rPr>
               <a:t>WFQ</a:t>
             </a:r>
@@ -1704,8 +1704,8 @@
         </p:nvSpPr>
         <p:spPr>
           <a:xfrm>
-            <a:off x="5879604" y="2034778"/>
-            <a:ext cx="904577" cy="238125"/>
+            <a:off x="5879902" y="2063353"/>
+            <a:ext cx="933599" cy="228600"/>
           </a:xfrm>
           <a:prstGeom prst="rect">
             <a:avLst/>
@@ -1736,8 +1736,8 @@
         </p:nvSpPr>
         <p:spPr>
           <a:xfrm>
-            <a:off x="6016079" y="2082403"/>
-            <a:ext cx="644259" cy="142875"/>
+            <a:off x="6016377" y="2110978"/>
+            <a:ext cx="673861" cy="133350"/>
           </a:xfrm>
           <a:prstGeom prst="rect">
             <a:avLst/>
@@ -1757,9 +1757,9 @@
                 <a:solidFill>
                   <a:srgbClr val="333333"/>
                 </a:solidFill>
-                <a:latin typeface="Times New Roman" pitchFamily="34" charset="0"/>
-                <a:ea typeface="Times New Roman" pitchFamily="34" charset="-122"/>
-                <a:cs typeface="Times New Roman" pitchFamily="34" charset="-120"/>
+                <a:latin typeface="Malgun Gothic" pitchFamily="34" charset="0"/>
+                <a:ea typeface="Malgun Gothic" pitchFamily="34" charset="-122"/>
+                <a:cs typeface="Malgun Gothic" pitchFamily="34" charset="-120"/>
               </a:rPr>
               <a:t>Rate Limiter</a:t>
             </a:r>
@@ -1775,8 +1775,8 @@
         </p:nvSpPr>
         <p:spPr>
           <a:xfrm>
-            <a:off x="3194000" y="2349103"/>
-            <a:ext cx="2190693" cy="104775"/>
+            <a:off x="3194000" y="2368153"/>
+            <a:ext cx="1657100" cy="123825"/>
           </a:xfrm>
           <a:prstGeom prst="rect">
             <a:avLst/>
@@ -1796,11 +1796,11 @@
                 <a:solidFill>
                   <a:srgbClr val="666666"/>
                 </a:solidFill>
-                <a:latin typeface="Times New Roman" pitchFamily="34" charset="0"/>
-                <a:ea typeface="Times New Roman" pitchFamily="34" charset="-122"/>
-                <a:cs typeface="Times New Roman" pitchFamily="34" charset="-120"/>
+                <a:latin typeface="Malgun Gothic" pitchFamily="34" charset="0"/>
+                <a:ea typeface="Malgun Gothic" pitchFamily="34" charset="-122"/>
+                <a:cs typeface="Malgun Gothic" pitchFamily="34" charset="-120"/>
               </a:rPr>
-              <a:t>Features: Aging, Boost, Dual-level JFI measurement</a:t>
+              <a:t>기능: 에이징, 부스트, 이중 수준 JFI 측정</a:t>
             </a:r>
             <a:endParaRPr lang="en-US" sz="800" dirty="0"/>
           </a:p>
@@ -1814,8 +1814,8 @@
         </p:nvSpPr>
         <p:spPr>
           <a:xfrm>
-            <a:off x="4496544" y="2650629"/>
-            <a:ext cx="153930" cy="171450"/>
+            <a:off x="4497288" y="2688729"/>
+            <a:ext cx="152412" cy="180975"/>
           </a:xfrm>
           <a:prstGeom prst="rect">
             <a:avLst/>
@@ -1835,9 +1835,9 @@
                 <a:solidFill>
                   <a:srgbClr val="888888"/>
                 </a:solidFill>
-                <a:latin typeface="Times New Roman" pitchFamily="34" charset="0"/>
-                <a:ea typeface="Times New Roman" pitchFamily="34" charset="-122"/>
-                <a:cs typeface="Times New Roman" pitchFamily="34" charset="-120"/>
+                <a:latin typeface="Malgun Gothic" pitchFamily="34" charset="0"/>
+                <a:ea typeface="Malgun Gothic" pitchFamily="34" charset="-122"/>
+                <a:cs typeface="Malgun Gothic" pitchFamily="34" charset="-120"/>
               </a:rPr>
               <a:t>▼</a:t>
             </a:r>
@@ -1853,7 +1853,7 @@
         </p:nvSpPr>
         <p:spPr>
           <a:xfrm>
-            <a:off x="381000" y="2898279"/>
+            <a:off x="381000" y="2945904"/>
             <a:ext cx="8382000" cy="453926"/>
           </a:xfrm>
           <a:prstGeom prst="rect">
@@ -1885,7 +1885,7 @@
         </p:nvSpPr>
         <p:spPr>
           <a:xfrm>
-            <a:off x="400050" y="2917329"/>
+            <a:off x="400050" y="2964954"/>
             <a:ext cx="2590800" cy="415826"/>
           </a:xfrm>
           <a:prstGeom prst="rect">
@@ -1915,7 +1915,7 @@
         </p:nvSpPr>
         <p:spPr>
           <a:xfrm>
-            <a:off x="552450" y="3044279"/>
+            <a:off x="552450" y="3091904"/>
             <a:ext cx="2331720" cy="161925"/>
           </a:xfrm>
           <a:prstGeom prst="rect">
@@ -1936,11 +1936,11 @@
                 <a:solidFill>
                   <a:srgbClr val="FFFFFF"/>
                 </a:solidFill>
-                <a:latin typeface="Times New Roman" pitchFamily="34" charset="0"/>
-                <a:ea typeface="Times New Roman" pitchFamily="34" charset="-122"/>
-                <a:cs typeface="Times New Roman" pitchFamily="34" charset="-120"/>
+                <a:latin typeface="Malgun Gothic" pitchFamily="34" charset="0"/>
+                <a:ea typeface="Malgun Gothic" pitchFamily="34" charset="-122"/>
+                <a:cs typeface="Malgun Gothic" pitchFamily="34" charset="-120"/>
               </a:rPr>
-              <a:t>Storage Layer</a:t>
+              <a:t>저장소 계층</a:t>
             </a:r>
             <a:endParaRPr lang="en-US" sz="1100" dirty="0"/>
           </a:p>
@@ -1954,8 +1954,8 @@
         </p:nvSpPr>
         <p:spPr>
           <a:xfrm>
-            <a:off x="3194000" y="3049042"/>
-            <a:ext cx="3675799" cy="152400"/>
+            <a:off x="3194000" y="3096667"/>
+            <a:ext cx="3154501" cy="152400"/>
           </a:xfrm>
           <a:prstGeom prst="rect">
             <a:avLst/>
@@ -1975,11 +1975,11 @@
                 <a:solidFill>
                   <a:srgbClr val="333333"/>
                 </a:solidFill>
-                <a:latin typeface="Times New Roman" pitchFamily="34" charset="0"/>
-                <a:ea typeface="Times New Roman" pitchFamily="34" charset="-122"/>
-                <a:cs typeface="Times New Roman" pitchFamily="34" charset="-120"/>
+                <a:latin typeface="Malgun Gothic" pitchFamily="34" charset="0"/>
+                <a:ea typeface="Malgun Gothic" pitchFamily="34" charset="-122"/>
+                <a:cs typeface="Malgun Gothic" pitchFamily="34" charset="-120"/>
               </a:rPr>
-              <a:t>Memory Arrays (Queue) · JSON Files (Log) · Ollama (LLM Backend)</a:t>
+              <a:t>메모리 배열 (큐) · JSON 파일 (로그) · Ollama (LLM 백엔드)</a:t>
             </a:r>
             <a:endParaRPr lang="en-US" sz="1000" dirty="0"/>
           </a:p>
@@ -1993,7 +1993,7 @@
         </p:nvSpPr>
         <p:spPr>
           <a:xfrm>
-            <a:off x="381000" y="4881711"/>
+            <a:off x="381000" y="4872186"/>
             <a:ext cx="8382000" cy="0"/>
           </a:xfrm>
           <a:prstGeom prst="line">
@@ -2016,8 +2016,8 @@
         </p:nvSpPr>
         <p:spPr>
           <a:xfrm>
-            <a:off x="381000" y="4937224"/>
-            <a:ext cx="8549640" cy="104775"/>
+            <a:off x="381000" y="4927699"/>
+            <a:ext cx="8549640" cy="114300"/>
           </a:xfrm>
           <a:prstGeom prst="rect">
             <a:avLst/>
@@ -2037,11 +2037,11 @@
                 <a:solidFill>
                   <a:srgbClr val="999999"/>
                 </a:solidFill>
-                <a:latin typeface="Times New Roman" pitchFamily="34" charset="0"/>
-                <a:ea typeface="Times New Roman" pitchFamily="34" charset="-122"/>
-                <a:cs typeface="Times New Roman" pitchFamily="34" charset="-120"/>
+                <a:latin typeface="Malgun Gothic" pitchFamily="34" charset="0"/>
+                <a:ea typeface="Malgun Gothic" pitchFamily="34" charset="-122"/>
+                <a:cs typeface="Malgun Gothic" pitchFamily="34" charset="-120"/>
               </a:rPr>
-              <a:t>Stack: Node.js 22 LTS + Express.js 4.18 + Jest 29.x (307 tests, 99.76% coverage)</a:t>
+              <a:t>Node.js 22 LTS + Express.js 4.18 + Jest 29.x (307 tests, 99.76% coverage)</a:t>
             </a:r>
             <a:endParaRPr lang="en-US" sz="750" dirty="0"/>
           </a:p>
